--- a/paper/workflow.pptx
+++ b/paper/workflow.pptx
@@ -256,7 +256,7 @@
           <a:p>
             <a:fld id="{CCC5F45F-7FF7-4AA6-9E5C-20A469923D65}" type="datetimeFigureOut">
               <a:rPr lang="en-GB" smtClean="0"/>
-              <a:t>09/01/2025</a:t>
+              <a:t>13/01/2025</a:t>
             </a:fld>
             <a:endParaRPr lang="en-GB"/>
           </a:p>
@@ -426,7 +426,7 @@
           <a:p>
             <a:fld id="{CCC5F45F-7FF7-4AA6-9E5C-20A469923D65}" type="datetimeFigureOut">
               <a:rPr lang="en-GB" smtClean="0"/>
-              <a:t>09/01/2025</a:t>
+              <a:t>13/01/2025</a:t>
             </a:fld>
             <a:endParaRPr lang="en-GB"/>
           </a:p>
@@ -606,7 +606,7 @@
           <a:p>
             <a:fld id="{CCC5F45F-7FF7-4AA6-9E5C-20A469923D65}" type="datetimeFigureOut">
               <a:rPr lang="en-GB" smtClean="0"/>
-              <a:t>09/01/2025</a:t>
+              <a:t>13/01/2025</a:t>
             </a:fld>
             <a:endParaRPr lang="en-GB"/>
           </a:p>
@@ -776,7 +776,7 @@
           <a:p>
             <a:fld id="{CCC5F45F-7FF7-4AA6-9E5C-20A469923D65}" type="datetimeFigureOut">
               <a:rPr lang="en-GB" smtClean="0"/>
-              <a:t>09/01/2025</a:t>
+              <a:t>13/01/2025</a:t>
             </a:fld>
             <a:endParaRPr lang="en-GB"/>
           </a:p>
@@ -1022,7 +1022,7 @@
           <a:p>
             <a:fld id="{CCC5F45F-7FF7-4AA6-9E5C-20A469923D65}" type="datetimeFigureOut">
               <a:rPr lang="en-GB" smtClean="0"/>
-              <a:t>09/01/2025</a:t>
+              <a:t>13/01/2025</a:t>
             </a:fld>
             <a:endParaRPr lang="en-GB"/>
           </a:p>
@@ -1254,7 +1254,7 @@
           <a:p>
             <a:fld id="{CCC5F45F-7FF7-4AA6-9E5C-20A469923D65}" type="datetimeFigureOut">
               <a:rPr lang="en-GB" smtClean="0"/>
-              <a:t>09/01/2025</a:t>
+              <a:t>13/01/2025</a:t>
             </a:fld>
             <a:endParaRPr lang="en-GB"/>
           </a:p>
@@ -1621,7 +1621,7 @@
           <a:p>
             <a:fld id="{CCC5F45F-7FF7-4AA6-9E5C-20A469923D65}" type="datetimeFigureOut">
               <a:rPr lang="en-GB" smtClean="0"/>
-              <a:t>09/01/2025</a:t>
+              <a:t>13/01/2025</a:t>
             </a:fld>
             <a:endParaRPr lang="en-GB"/>
           </a:p>
@@ -1739,7 +1739,7 @@
           <a:p>
             <a:fld id="{CCC5F45F-7FF7-4AA6-9E5C-20A469923D65}" type="datetimeFigureOut">
               <a:rPr lang="en-GB" smtClean="0"/>
-              <a:t>09/01/2025</a:t>
+              <a:t>13/01/2025</a:t>
             </a:fld>
             <a:endParaRPr lang="en-GB"/>
           </a:p>
@@ -1834,7 +1834,7 @@
           <a:p>
             <a:fld id="{CCC5F45F-7FF7-4AA6-9E5C-20A469923D65}" type="datetimeFigureOut">
               <a:rPr lang="en-GB" smtClean="0"/>
-              <a:t>09/01/2025</a:t>
+              <a:t>13/01/2025</a:t>
             </a:fld>
             <a:endParaRPr lang="en-GB"/>
           </a:p>
@@ -2111,7 +2111,7 @@
           <a:p>
             <a:fld id="{CCC5F45F-7FF7-4AA6-9E5C-20A469923D65}" type="datetimeFigureOut">
               <a:rPr lang="en-GB" smtClean="0"/>
-              <a:t>09/01/2025</a:t>
+              <a:t>13/01/2025</a:t>
             </a:fld>
             <a:endParaRPr lang="en-GB"/>
           </a:p>
@@ -2368,7 +2368,7 @@
           <a:p>
             <a:fld id="{CCC5F45F-7FF7-4AA6-9E5C-20A469923D65}" type="datetimeFigureOut">
               <a:rPr lang="en-GB" smtClean="0"/>
-              <a:t>09/01/2025</a:t>
+              <a:t>13/01/2025</a:t>
             </a:fld>
             <a:endParaRPr lang="en-GB"/>
           </a:p>
@@ -2581,7 +2581,7 @@
           <a:p>
             <a:fld id="{CCC5F45F-7FF7-4AA6-9E5C-20A469923D65}" type="datetimeFigureOut">
               <a:rPr lang="en-GB" smtClean="0"/>
-              <a:t>09/01/2025</a:t>
+              <a:t>13/01/2025</a:t>
             </a:fld>
             <a:endParaRPr lang="en-GB"/>
           </a:p>
@@ -6449,14 +6449,14 @@
           <p:nvPr>
             <p:extLst>
               <p:ext uri="{D42A27DB-BD31-4B8C-83A1-F6EECF244321}">
-                <p14:modId xmlns:p14="http://schemas.microsoft.com/office/powerpoint/2010/main" val="1098469446"/>
+                <p14:modId xmlns:p14="http://schemas.microsoft.com/office/powerpoint/2010/main" val="1094302236"/>
               </p:ext>
             </p:extLst>
           </p:nvPr>
         </p:nvGraphicFramePr>
         <p:xfrm>
           <a:off x="440242" y="1282774"/>
-          <a:ext cx="6364981" cy="2225040"/>
+          <a:ext cx="6364981" cy="2265680"/>
         </p:xfrm>
         <a:graphic>
           <a:graphicData uri="http://schemas.openxmlformats.org/drawingml/2006/table">
@@ -6522,7 +6522,7 @@
                     <a:lstStyle/>
                     <a:p>
                       <a:pPr algn="ctr"/>
-                      <a:endParaRPr lang="en-US" sz="1050" b="1" noProof="0" dirty="0">
+                      <a:endParaRPr lang="en-US" sz="900" b="1" noProof="0" dirty="0">
                         <a:solidFill>
                           <a:srgbClr val="7030A0"/>
                         </a:solidFill>
@@ -6570,64 +6570,6 @@
                     </a:lnBlToTr>
                     <a:solidFill>
                       <a:schemeClr val="bg1"/>
-                    </a:solidFill>
-                  </a:tcPr>
-                </a:tc>
-                <a:tc>
-                  <a:txBody>
-                    <a:bodyPr/>
-                    <a:lstStyle/>
-                    <a:p>
-                      <a:pPr algn="ctr"/>
-                      <a:r>
-                        <a:rPr lang="en-US" sz="900" b="1" noProof="0" dirty="0">
-                          <a:solidFill>
-                            <a:srgbClr val="7030A0"/>
-                          </a:solidFill>
-                        </a:rPr>
-                        <a:t>SaaS</a:t>
-                      </a:r>
-                    </a:p>
-                  </a:txBody>
-                  <a:tcPr anchor="ctr">
-                    <a:lnL w="12700" cap="flat" cmpd="sng" algn="ctr">
-                      <a:solidFill>
-                        <a:srgbClr val="002060"/>
-                      </a:solidFill>
-                      <a:prstDash val="solid"/>
-                      <a:round/>
-                      <a:headEnd type="none" w="med" len="med"/>
-                      <a:tailEnd type="none" w="med" len="med"/>
-                    </a:lnL>
-                    <a:lnR w="12700" cap="flat" cmpd="sng" algn="ctr">
-                      <a:solidFill>
-                        <a:srgbClr val="002060"/>
-                      </a:solidFill>
-                      <a:prstDash val="solid"/>
-                      <a:round/>
-                      <a:headEnd type="none" w="med" len="med"/>
-                      <a:tailEnd type="none" w="med" len="med"/>
-                    </a:lnR>
-                    <a:lnT w="12700" cap="flat" cmpd="sng" algn="ctr">
-                      <a:solidFill>
-                        <a:srgbClr val="002060"/>
-                      </a:solidFill>
-                      <a:prstDash val="solid"/>
-                      <a:round/>
-                      <a:headEnd type="none" w="med" len="med"/>
-                      <a:tailEnd type="none" w="med" len="med"/>
-                    </a:lnT>
-                    <a:lnB w="12700" cap="flat" cmpd="sng" algn="ctr">
-                      <a:solidFill>
-                        <a:srgbClr val="002060"/>
-                      </a:solidFill>
-                      <a:prstDash val="solid"/>
-                      <a:round/>
-                      <a:headEnd type="none" w="med" len="med"/>
-                      <a:tailEnd type="none" w="med" len="med"/>
-                    </a:lnB>
-                    <a:solidFill>
-                      <a:srgbClr val="F5F2F5"/>
                     </a:solidFill>
                   </a:tcPr>
                 </a:tc>
@@ -6643,7 +6585,7 @@
                             <a:srgbClr val="7030A0"/>
                           </a:solidFill>
                         </a:rPr>
-                        <a:t>0/Few-shot Local Model</a:t>
+                        <a:t>0/Few-shot Models</a:t>
                       </a:r>
                     </a:p>
                   </a:txBody>
@@ -6694,24 +6636,8 @@
                     <a:bodyPr/>
                     <a:lstStyle/>
                     <a:p>
-                      <a:pPr marL="0" marR="0" lvl="0" indent="0" algn="ctr" defTabSz="623987" rtl="0" eaLnBrk="1" fontAlgn="auto" latinLnBrk="0" hangingPunct="1">
-                        <a:lnSpc>
-                          <a:spcPct val="100000"/>
-                        </a:lnSpc>
-                        <a:spcBef>
-                          <a:spcPts val="0"/>
-                        </a:spcBef>
-                        <a:spcAft>
-                          <a:spcPts val="0"/>
-                        </a:spcAft>
-                        <a:buClrTx/>
-                        <a:buSzTx/>
-                        <a:buFontTx/>
-                        <a:buNone/>
-                        <a:tabLst/>
-                        <a:defRPr/>
-                      </a:pPr>
-                      <a:endParaRPr lang="es-ES" sz="1050" dirty="0">
+                      <a:pPr algn="ctr"/>
+                      <a:endParaRPr lang="en-US" sz="1050" b="1" noProof="0" dirty="0">
                         <a:solidFill>
                           <a:srgbClr val="7030A0"/>
                         </a:solidFill>
@@ -6720,7 +6646,9 @@
                   </a:txBody>
                   <a:tcPr anchor="ctr">
                     <a:lnL w="12700" cap="flat" cmpd="sng" algn="ctr">
-                      <a:noFill/>
+                      <a:solidFill>
+                        <a:srgbClr val="002060"/>
+                      </a:solidFill>
                       <a:prstDash val="solid"/>
                       <a:round/>
                       <a:headEnd type="none" w="med" len="med"/>
@@ -6758,7 +6686,7 @@
                     </a:solidFill>
                   </a:tcPr>
                 </a:tc>
-                <a:tc gridSpan="3">
+                <a:tc gridSpan="4">
                   <a:txBody>
                     <a:bodyPr/>
                     <a:lstStyle/>
@@ -6770,8 +6698,58 @@
                             <a:srgbClr val="7030A0"/>
                           </a:solidFill>
                         </a:rPr>
-                        <a:t>Fine Tuned Local Model</a:t>
+                        <a:t>Fine Tuned Models</a:t>
                       </a:r>
+                    </a:p>
+                  </a:txBody>
+                  <a:tcPr anchor="ctr">
+                    <a:lnL w="12700" cap="flat" cmpd="sng" algn="ctr">
+                      <a:solidFill>
+                        <a:srgbClr val="002060"/>
+                      </a:solidFill>
+                      <a:prstDash val="solid"/>
+                      <a:round/>
+                      <a:headEnd type="none" w="med" len="med"/>
+                      <a:tailEnd type="none" w="med" len="med"/>
+                    </a:lnL>
+                    <a:lnR w="12700" cap="flat" cmpd="sng" algn="ctr">
+                      <a:solidFill>
+                        <a:srgbClr val="002060"/>
+                      </a:solidFill>
+                      <a:prstDash val="solid"/>
+                      <a:round/>
+                      <a:headEnd type="none" w="med" len="med"/>
+                      <a:tailEnd type="none" w="med" len="med"/>
+                    </a:lnR>
+                    <a:lnT w="12700" cap="flat" cmpd="sng" algn="ctr">
+                      <a:solidFill>
+                        <a:srgbClr val="002060"/>
+                      </a:solidFill>
+                      <a:prstDash val="solid"/>
+                      <a:round/>
+                      <a:headEnd type="none" w="med" len="med"/>
+                      <a:tailEnd type="none" w="med" len="med"/>
+                    </a:lnT>
+                    <a:lnB w="12700" cap="flat" cmpd="sng" algn="ctr">
+                      <a:solidFill>
+                        <a:srgbClr val="002060"/>
+                      </a:solidFill>
+                      <a:prstDash val="solid"/>
+                      <a:round/>
+                      <a:headEnd type="none" w="med" len="med"/>
+                      <a:tailEnd type="none" w="med" len="med"/>
+                    </a:lnB>
+                    <a:solidFill>
+                      <a:srgbClr val="F5F2F5"/>
+                    </a:solidFill>
+                  </a:tcPr>
+                </a:tc>
+                <a:tc hMerge="1">
+                  <a:txBody>
+                    <a:bodyPr/>
+                    <a:lstStyle/>
+                    <a:p>
+                      <a:endParaRPr dirty="0"/>
                     </a:p>
                   </a:txBody>
                   <a:tcPr anchor="ctr">
@@ -6933,7 +6911,7 @@
                     <a:lstStyle/>
                     <a:p>
                       <a:pPr algn="ctr"/>
-                      <a:endParaRPr lang="en-US" sz="1050" noProof="0" dirty="0">
+                      <a:endParaRPr lang="en-US" sz="900" noProof="0" dirty="0">
                         <a:solidFill>
                           <a:srgbClr val="7030A0"/>
                         </a:solidFill>
@@ -7014,7 +6992,7 @@
                             <a:srgbClr val="7030A0"/>
                           </a:solidFill>
                         </a:rPr>
-                        <a:t>OpenAI gpt4-o</a:t>
+                        <a:t>gpt4-o</a:t>
                       </a:r>
                     </a:p>
                   </a:txBody>
@@ -7083,13 +7061,18 @@
                         <a:defRPr/>
                       </a:pPr>
                       <a:r>
-                        <a:rPr lang="en-US" sz="1050" noProof="0" dirty="0">
+                        <a:rPr lang="en-US" sz="900" noProof="0" dirty="0" err="1">
                           <a:solidFill>
                             <a:srgbClr val="7030A0"/>
                           </a:solidFill>
                         </a:rPr>
-                        <a:t>0-shot (1)</a:t>
+                        <a:t>pixtral</a:t>
                       </a:r>
+                      <a:endParaRPr lang="en-US" sz="900" noProof="0" dirty="0">
+                        <a:solidFill>
+                          <a:srgbClr val="7030A0"/>
+                        </a:solidFill>
+                      </a:endParaRPr>
                     </a:p>
                   </a:txBody>
                   <a:tcPr anchor="ctr">
@@ -7157,12 +7140,12 @@
                         <a:defRPr/>
                       </a:pPr>
                       <a:r>
-                        <a:rPr lang="en-US" sz="1050" noProof="0" dirty="0">
+                        <a:rPr lang="en-US" sz="900" noProof="0" dirty="0">
                           <a:solidFill>
                             <a:srgbClr val="7030A0"/>
                           </a:solidFill>
                         </a:rPr>
-                        <a:t>0-shot (2)</a:t>
+                        <a:t>gpt4-o</a:t>
                       </a:r>
                     </a:p>
                   </a:txBody>
@@ -7215,7 +7198,7 @@
                     <a:p>
                       <a:pPr algn="ctr"/>
                       <a:r>
-                        <a:rPr lang="en-US" sz="1050" noProof="0" dirty="0">
+                        <a:rPr lang="en-US" sz="900" noProof="0" dirty="0">
                           <a:solidFill>
                             <a:srgbClr val="7030A0"/>
                           </a:solidFill>
@@ -7273,7 +7256,7 @@
                     <a:p>
                       <a:pPr algn="ctr"/>
                       <a:r>
-                        <a:rPr lang="en-US" sz="1050" noProof="0" dirty="0">
+                        <a:rPr lang="en-US" sz="900" noProof="0" dirty="0">
                           <a:solidFill>
                             <a:srgbClr val="7030A0"/>
                           </a:solidFill>
@@ -7331,7 +7314,7 @@
                     <a:p>
                       <a:pPr algn="ctr"/>
                       <a:r>
-                        <a:rPr lang="en-US" sz="1050" noProof="0" dirty="0">
+                        <a:rPr lang="en-US" sz="900" noProof="0" dirty="0">
                           <a:solidFill>
                             <a:srgbClr val="7030A0"/>
                           </a:solidFill>
@@ -7396,7 +7379,7 @@
                     <a:p>
                       <a:pPr algn="l"/>
                       <a:r>
-                        <a:rPr lang="en-US" sz="1050" noProof="0" dirty="0">
+                        <a:rPr lang="en-US" sz="900" noProof="0" dirty="0">
                           <a:solidFill>
                             <a:srgbClr val="7030A0"/>
                           </a:solidFill>
@@ -7453,7 +7436,17 @@
                     <a:lstStyle/>
                     <a:p>
                       <a:pPr algn="l"/>
-                      <a:endParaRPr lang="en-US" sz="1050" noProof="0" dirty="0"/>
+                      <a:r>
+                        <a:rPr lang="en-US" sz="1050" noProof="0" dirty="0"/>
+                        <a:t>0.836 / 0.752</a:t>
+                      </a:r>
+                    </a:p>
+                    <a:p>
+                      <a:pPr algn="l"/>
+                      <a:r>
+                        <a:rPr lang="en-US" sz="1050" noProof="0" dirty="0"/>
+                        <a:t>0.929 / 0.885</a:t>
+                      </a:r>
                     </a:p>
                   </a:txBody>
                   <a:tcPr anchor="ctr">
@@ -7504,7 +7497,17 @@
                     <a:lstStyle/>
                     <a:p>
                       <a:pPr algn="l"/>
-                      <a:endParaRPr lang="en-US" sz="1050" noProof="0" dirty="0"/>
+                      <a:r>
+                        <a:rPr lang="en-US" sz="1050" noProof="0" dirty="0"/>
+                        <a:t>0.917 / 0.713</a:t>
+                      </a:r>
+                    </a:p>
+                    <a:p>
+                      <a:pPr algn="l"/>
+                      <a:r>
+                        <a:rPr lang="en-US" sz="1050" noProof="0" dirty="0"/>
+                        <a:t>0.xyz / 0.808</a:t>
+                      </a:r>
                     </a:p>
                   </a:txBody>
                   <a:tcPr anchor="ctr">
@@ -7767,7 +7770,7 @@
                     <a:p>
                       <a:pPr algn="l"/>
                       <a:r>
-                        <a:rPr lang="en-US" sz="1050" noProof="0" dirty="0">
+                        <a:rPr lang="en-US" sz="900" noProof="0" dirty="0">
                           <a:solidFill>
                             <a:srgbClr val="7030A0"/>
                           </a:solidFill>
@@ -8138,7 +8141,7 @@
                     <a:p>
                       <a:pPr algn="l"/>
                       <a:r>
-                        <a:rPr lang="en-US" sz="1050" noProof="0" dirty="0">
+                        <a:rPr lang="en-US" sz="900" noProof="0" dirty="0">
                           <a:solidFill>
                             <a:srgbClr val="7030A0"/>
                           </a:solidFill>
@@ -8259,7 +8262,7 @@
                             <a:srgbClr val="0070C0"/>
                           </a:solidFill>
                         </a:rPr>
-                        <a:t>True</a:t>
+                        <a:t>False</a:t>
                       </a:r>
                     </a:p>
                   </a:txBody>
@@ -8551,7 +8554,7 @@
                     <a:p>
                       <a:pPr algn="l"/>
                       <a:r>
-                        <a:rPr lang="en-US" sz="1050" noProof="0" dirty="0">
+                        <a:rPr lang="en-US" sz="900" noProof="0" dirty="0">
                           <a:solidFill>
                             <a:srgbClr val="7030A0"/>
                           </a:solidFill>
